--- a/curso/pptx/S71.pptx
+++ b/curso/pptx/S71.pptx
@@ -5202,7 +5202,7 @@
                 </a:solidFill>
                 <a:latin typeface="Nunito Sans"/>
               </a:rPr>
-              <a:t>¿Se entiende la conclusión en una sola frase?</a:t>
+              <a:t>用一句话就能让人听懂结论吗？</a:t>
             </a:r>
           </a:p>
           <a:p>
@@ -5227,7 +5227,7 @@
                 </a:solidFill>
                 <a:latin typeface="Nunito Sans"/>
               </a:rPr>
-              <a:t>¿Cada razón es verdad, viene a cuento y es suficiente?</a:t>
+              <a:t>每条理由都是真的、相关的、而且足够吗？</a:t>
             </a:r>
           </a:p>
           <a:p>
@@ -5252,7 +5252,7 @@
                 </a:solidFill>
                 <a:latin typeface="Nunito Sans"/>
               </a:rPr>
-              <a:t>¿El ejemplo muestra de verdad lo que digo?</a:t>
+              <a:t>这个例子真的说明了我说的内容吗？</a:t>
             </a:r>
           </a:p>
           <a:p>
@@ -5277,7 +5277,7 @@
                 </a:solidFill>
                 <a:latin typeface="Nunito Sans"/>
               </a:rPr>
-              <a:t>¿He respondido a la objeción más fuerte, no a una deformada?</a:t>
+              <a:t>我回应的是最有力的反对意见，而不是被歪曲的吗？</a:t>
             </a:r>
           </a:p>
           <a:p>
@@ -5302,7 +5302,7 @@
                 </a:solidFill>
                 <a:latin typeface="Nunito Sans"/>
               </a:rPr>
-              <a:t>Si no sé responderla, quizá toca cambiar de opinión （第57课）.</a:t>
+              <a:t>如果我回应不了，也许该改变想法了（第57课）。</a:t>
             </a:r>
           </a:p>
         </p:txBody>
@@ -7044,7 +7044,7 @@
                 </a:solidFill>
                 <a:latin typeface="Nunito Sans"/>
               </a:rPr>
-              <a:t>1. Conclusión:</a:t>
+              <a:t>1. 结论：</a:t>
             </a:r>
             <a:r>
               <a:rPr sz="2800" b="0">
@@ -7053,7 +7053,7 @@
                 </a:solidFill>
                 <a:latin typeface="Nunito Sans"/>
               </a:rPr>
-              <a:t> lo que defiendo, dicho claro y en una frase.</a:t>
+              <a:t>我捍卫的观点，清楚地用一句话说出来。</a:t>
             </a:r>
           </a:p>
           <a:p>
@@ -7078,7 +7078,7 @@
                 </a:solidFill>
                 <a:latin typeface="Nunito Sans"/>
               </a:rPr>
-              <a:t>2. Razones:</a:t>
+              <a:t>2. 理由：</a:t>
             </a:r>
             <a:r>
               <a:rPr sz="2800" b="0">
@@ -7087,7 +7087,7 @@
                 </a:solidFill>
                 <a:latin typeface="Nunito Sans"/>
               </a:rPr>
-              <a:t> dos o tres, que pasen las tres preguntas （第9课）.</a:t>
+              <a:t>两三条，要能通过三个问题（第9课）。</a:t>
             </a:r>
           </a:p>
           <a:p>
@@ -7112,7 +7112,7 @@
                 </a:solidFill>
                 <a:latin typeface="Nunito Sans"/>
               </a:rPr>
-              <a:t>3. Ejemplo:</a:t>
+              <a:t>3. 例子：</a:t>
             </a:r>
             <a:r>
               <a:rPr sz="2800" b="0">
@@ -7121,7 +7121,7 @@
                 </a:solidFill>
                 <a:latin typeface="Nunito Sans"/>
               </a:rPr>
-              <a:t> un caso que muestre lo que digo.</a:t>
+              <a:t>一个能说明我所说内容的事例。</a:t>
             </a:r>
           </a:p>
           <a:p>
@@ -7146,7 +7146,7 @@
                 </a:solidFill>
                 <a:latin typeface="Nunito Sans"/>
               </a:rPr>
-              <a:t>4. Objeción y respuesta:</a:t>
+              <a:t>4. 反对意见和回应：</a:t>
             </a:r>
             <a:r>
               <a:rPr sz="2800" b="0">
@@ -7155,7 +7155,7 @@
                 </a:solidFill>
                 <a:latin typeface="Nunito Sans"/>
               </a:rPr>
-              <a:t> qué diría quien no está de acuerdo, y mi respuesta.</a:t>
+              <a:t>不同意的人会怎么说，以及我的回应。</a:t>
             </a:r>
           </a:p>
         </p:txBody>
@@ -7398,7 +7398,7 @@
                 </a:solidFill>
                 <a:latin typeface="Nunito Sans"/>
               </a:rPr>
-              <a:t>La buscas tú, antes de que te la digan</a:t>
+              <a:t>你要自己去找，在别人对你说之前</a:t>
             </a:r>
           </a:p>
           <a:p>
@@ -7423,7 +7423,7 @@
                 </a:solidFill>
                 <a:latin typeface="Nunito Sans"/>
               </a:rPr>
-              <a:t>La respondes con razones, no con un «y punto»</a:t>
+              <a:t>你要用理由来回应，而不是用一句“就这样”</a:t>
             </a:r>
           </a:p>
           <a:p>
@@ -7448,7 +7448,7 @@
                 </a:solidFill>
                 <a:latin typeface="Nunito Sans"/>
               </a:rPr>
-              <a:t>A veces te obliga a cambiar o matizar tu conclusión</a:t>
+              <a:t>有时它会迫使你改变或修正你的结论</a:t>
             </a:r>
           </a:p>
         </p:txBody>
@@ -7682,7 +7682,7 @@
                 </a:solidFill>
                 <a:latin typeface="Nunito Sans"/>
               </a:rPr>
-              <a:t>Decir la conclusión más fuerte o más veces</a:t>
+              <a:t>把结论说得更大声或说更多遍</a:t>
             </a:r>
           </a:p>
           <a:p>
@@ -7707,7 +7707,7 @@
                 </a:solidFill>
                 <a:latin typeface="Nunito Sans"/>
               </a:rPr>
-              <a:t>«Porque sí» o «y punto»</a:t>
+              <a:t>“因为就是这样”或“就这样”</a:t>
             </a:r>
           </a:p>
           <a:p>
@@ -7732,7 +7732,7 @@
                 </a:solidFill>
                 <a:latin typeface="Nunito Sans"/>
               </a:rPr>
-              <a:t>Hacer como si nadie pudiera pensar distinto</a:t>
+              <a:t>装作没有人可以想得不一样</a:t>
             </a:r>
           </a:p>
         </p:txBody>
@@ -7862,7 +7862,7 @@
                 </a:solidFill>
                 <a:latin typeface="Nunito Sans"/>
               </a:rPr>
-              <a:t>Dar razones que pasen las tres preguntas</a:t>
+              <a:t>给出能通过三个问题的理由</a:t>
             </a:r>
           </a:p>
           <a:p>
@@ -7887,7 +7887,7 @@
                 </a:solidFill>
                 <a:latin typeface="Nunito Sans"/>
               </a:rPr>
-              <a:t>Poner un ejemplo</a:t>
+              <a:t>举一个例子</a:t>
             </a:r>
           </a:p>
           <a:p>
@@ -7912,7 +7912,7 @@
                 </a:solidFill>
                 <a:latin typeface="Nunito Sans"/>
               </a:rPr>
-              <a:t>Pensar qué diría el otro y responderle</a:t>
+              <a:t>想一想对方会说什么，并回应他</a:t>
             </a:r>
           </a:p>
         </p:txBody>

--- a/curso/pptx/S71.pptx
+++ b/curso/pptx/S71.pptx
@@ -4247,7 +4247,7 @@
                           </a:solidFill>
                           <a:latin typeface="Nunito Sans"/>
                         </a:rPr>
-                        <a:t>“编造的例子：星期一，陈背了八公斤”</a:t>
+                        <a:t>“编造的例子：星期一，一个男孩背了八公斤”</a:t>
                       </a:r>
                     </a:p>
                   </a:txBody>
@@ -4407,7 +4407,7 @@
                 </a:solidFill>
                 <a:latin typeface="Fredoka"/>
               </a:rPr>
-              <a:t>案例2 · 凯文和烟花</a:t>
+              <a:t>案例2 · 一个男孩和烟花</a:t>
             </a:r>
           </a:p>
         </p:txBody>
@@ -4489,7 +4489,7 @@
                 </a:solidFill>
                 <a:latin typeface="Nunito Sans"/>
               </a:rPr>
-              <a:t>凯文想用书面的方式说服家人，让他和朋友们一起去看毕尔巴鄂大节的烟花。</a:t>
+              <a:t>一个男孩想用书面的方式说服家人，让他和朋友们一起去看毕尔巴鄂大节的烟花。</a:t>
             </a:r>
           </a:p>
         </p:txBody>
@@ -4562,7 +4562,7 @@
                 </a:solidFill>
                 <a:latin typeface="Nunito Sans"/>
               </a:rPr>
-              <a:t>理由：“我们四个人一起去，十一点坐地铁回来。”例子：“去年奥马尔去了，一切都很顺利。”</a:t>
+              <a:t>理由：“我们四个人一起去，十一点坐地铁回来。”例子：“去年一个同学去了，一切都很顺利。”</a:t>
             </a:r>
           </a:p>
           <a:p>
@@ -4798,7 +4798,7 @@
                 </a:solidFill>
                 <a:latin typeface="Nunito Sans"/>
               </a:rPr>
-              <a:t>艾托尔捍卫课间用手机，他写道：“有人会说，想禁止的人讨厌科技。但这太荒唐了。”</a:t>
+              <a:t>一个男孩捍卫课间用手机，他写道：“有人会说，想禁止的人讨厌科技。但这太荒唐了。”</a:t>
             </a:r>
           </a:p>
         </p:txBody>
@@ -4846,7 +4846,7 @@
                 </a:solidFill>
                 <a:latin typeface="Nunito Sans"/>
               </a:rPr>
-              <a:t>艾托尔写了一个反对意见并回应了它。他的论证完整了吗？</a:t>
+              <a:t>这个男孩写了一个反对意见并回应了它。他的论证完整了吗？</a:t>
             </a:r>
           </a:p>
           <a:p>
@@ -6710,7 +6710,7 @@
                 </a:solidFill>
                 <a:latin typeface="Nunito Sans"/>
               </a:rPr>
-              <a:t>蕾尔在班级群里写道：“应该让我们课间用手机。就这样。”</a:t>
+              <a:t>一个女孩在班级群里写道：“应该让我们课间用手机。就这样。”</a:t>
             </a:r>
           </a:p>
         </p:txBody>
